--- a/capstone_fall2026/slides/familyfinancechat-fall2026-heygen.pptx
+++ b/capstone_fall2026/slides/familyfinancechat-fall2026-heygen.pptx
@@ -536,7 +536,7 @@
           <a:lstStyle/>
           <a:p>
             <a:r>
-              <a:t>This is FamilyFinanceChat. Two jobs this semester: make the platform solid, and give the client a face.</a:t>
+              <a:t>This is Family Finance Chat. Two jobs this semester: make it solid, and give it a face.</a:t>
             </a:r>
           </a:p>
         </p:txBody>
@@ -606,7 +606,7 @@
           <a:lstStyle/>
           <a:p>
             <a:r>
-              <a:t>The last team inherited six and a half thousand lines of that code, forked here. It froze us on one old version. They removed all of it. Our version is one line.</a:t>
+              <a:t>The last team learned the hard way. Six and a half thousand lines of copied code, frozen on one old version. They deleted it all. Ours is one line.</a:t>
             </a:r>
           </a:p>
         </p:txBody>
@@ -676,7 +676,7 @@
           <a:lstStyle/>
           <a:p>
             <a:r>
-              <a:t>So the test for anything we build: could we take their next release tomorrow, unchanged?</a:t>
+              <a:t>Before we build anything we ask: if they shipped a release tomorrow, would we still work?</a:t>
             </a:r>
           </a:p>
         </p:txBody>
@@ -746,7 +746,7 @@
           <a:lstStyle/>
           <a:p>
             <a:r>
-              <a:t>The first job is unglamorous, and the course depends on it. Upgrade to the current version one step at a time — these upgrades change the database, and you cannot undo it.</a:t>
+              <a:t>The first job is what the course depends on. Upgrade to current, one careful step at a time. These rewrite the database. There's no undo.</a:t>
             </a:r>
           </a:p>
         </p:txBody>
@@ -816,7 +816,7 @@
           <a:lstStyle/>
           <a:p>
             <a:r>
-              <a:t>Give the professor a web address, not a laptop.</a:t>
+              <a:t>Give the professor a web address. No laptop, no terminal, no developer.</a:t>
             </a:r>
           </a:p>
         </p:txBody>
@@ -886,7 +886,7 @@
           <a:lstStyle/>
           <a:p>
             <a:r>
-              <a:t>Automate deployment and testing, so a bad change is caught before it reaches students.</a:t>
+              <a:t>Automate the testing, so a bad change is caught by us, not a student.</a:t>
             </a:r>
           </a:p>
         </p:txBody>
@@ -956,7 +956,7 @@
           <a:lstStyle/>
           <a:p>
             <a:r>
-              <a:t>And delete the last of the old fork, so nobody brings it back.</a:t>
+              <a:t>And clear out the last of that old fork, so nobody drags it back.</a:t>
             </a:r>
           </a:p>
         </p:txBody>
@@ -1026,7 +1026,7 @@
           <a:lstStyle/>
           <a:p>
             <a:r>
-              <a:t>Today the student types to the client.</a:t>
+              <a:t>Now the part we're excited about. Today, the student types.</a:t>
             </a:r>
           </a:p>
         </p:txBody>
@@ -1096,7 +1096,7 @@
           <a:lstStyle/>
           <a:p>
             <a:r>
-              <a:t>We want them to talk to it — a face that listens and answers out loud, in character.</a:t>
+              <a:t>We want them to speak. To a face that listens and answers out loud, in character.</a:t>
             </a:r>
           </a:p>
         </p:txBody>
@@ -1166,7 +1166,7 @@
           <a:lstStyle/>
           <a:p>
             <a:r>
-              <a:t>This course prepares them for a room with a real family, where you ask the hard question out loud, once, while somebody watches. You cannot rehearse that with a backspace key.</a:t>
+              <a:t>Because soon they'll sit with a real family, asking the hardest question out loud, once, while everyone watches. You can't rehearse that with a backspace key.</a:t>
             </a:r>
           </a:p>
         </p:txBody>
@@ -1236,7 +1236,7 @@
           <a:lstStyle/>
           <a:p>
             <a:r>
-              <a:t>So how do we add a face without breaking that rule?</a:t>
+              <a:t>So how do we add a face without breaking our rule?</a:t>
             </a:r>
           </a:p>
         </p:txBody>
@@ -1306,7 +1306,7 @@
           <a:lstStyle/>
           <a:p>
             <a:r>
-              <a:t>A student practises financial advising against an A-I client — a realistic family, grounded in the course documents, so it does not invent facts.</a:t>
+              <a:t>Picture a student practising a hard conversation about money. Across from them, an A-I family built from the course documents. It never invents facts.</a:t>
             </a:r>
           </a:p>
         </p:txBody>
@@ -1376,7 +1376,7 @@
           <a:lstStyle/>
           <a:p>
             <a:r>
-              <a:t>We build it beside the platform — a separate app in its own container.</a:t>
+              <a:t>We don't build it inside the platform. We build it alongside. Its own container.</a:t>
             </a:r>
           </a:p>
         </p:txBody>
@@ -1446,7 +1446,7 @@
           <a:lstStyle/>
           <a:p>
             <a:r>
-              <a:t>The student speaks to it, it asks Open WebUI for the answer, and Open WebUI stays untouched. Same brain, same grading.</a:t>
+              <a:t>The student talks to it, it asks Open Web U-I for the answer, and the platform never notices. Same brain, same grading.</a:t>
             </a:r>
           </a:p>
         </p:txBody>
@@ -1516,7 +1516,7 @@
           <a:lstStyle/>
           <a:p>
             <a:r>
-              <a:t>If it does not work out, we delete one container. The rule chose the better design for us.</a:t>
+              <a:t>And if it doesn't pan out, we delete one container. The rule didn't limit the design. It gave us a better one.</a:t>
             </a:r>
           </a:p>
         </p:txBody>
@@ -1586,7 +1586,7 @@
           <a:lstStyle/>
           <a:p>
             <a:r>
-              <a:t>Three numbers decide whether this is real. Speed — the client must answer in about one point two seconds, or it stops feeling like a conversation.</a:t>
+              <a:t>Three numbers tell us whether this is real. Speed. It answers in about one point two seconds, or it stops feeling like a conversation.</a:t>
             </a:r>
           </a:p>
         </p:txBody>
@@ -1656,7 +1656,7 @@
           <a:lstStyle/>
           <a:p>
             <a:r>
-              <a:t>Cost — about four hundred dollars a semester for a class of forty, hard-capped.</a:t>
+              <a:t>Cost. Around four hundred dollars a semester for a class of forty, capped so it can't surprise us.</a:t>
             </a:r>
           </a:p>
         </p:txBody>
@@ -1726,7 +1726,7 @@
           <a:lstStyle/>
           <a:p>
             <a:r>
-              <a:t>Permission — student voice and video are education records. Consent is settled in week two, before anything is recorded.</a:t>
+              <a:t>And permission. A student's voice and face are protected records. Consent is settled in week two.</a:t>
             </a:r>
           </a:p>
         </p:txBody>
@@ -1796,7 +1796,7 @@
           <a:lstStyle/>
           <a:p>
             <a:r>
-              <a:t>If any one fails, the answer is no. And no is an acceptable answer.</a:t>
+              <a:t>If any one fails, we stop. And stopping is a perfectly good answer.</a:t>
             </a:r>
           </a:p>
         </p:txBody>
@@ -1866,7 +1866,7 @@
           <a:lstStyle/>
           <a:p>
             <a:r>
-              <a:t>By the end of September, students can talk to it — voice only, no face yet.</a:t>
+              <a:t>By late September, students can talk to it. Voice only, no face yet.</a:t>
             </a:r>
           </a:p>
         </p:txBody>
@@ -1936,7 +1936,7 @@
           <a:lstStyle/>
           <a:p>
             <a:r>
-              <a:t>By the twentieth of October we pick an avatar provider, or decide to stop.</a:t>
+              <a:t>By the twentieth of October, we pick an avatar provider, or decide not to.</a:t>
             </a:r>
           </a:p>
         </p:txBody>
@@ -2006,7 +2006,7 @@
           <a:lstStyle/>
           <a:p>
             <a:r>
-              <a:t>A week later, the platform is upgraded.</a:t>
+              <a:t>A week later, the platform is current.</a:t>
             </a:r>
           </a:p>
         </p:txBody>
@@ -2076,7 +2076,7 @@
           <a:lstStyle/>
           <a:p>
             <a:r>
-              <a:t>Every question is scored automatically, and the instructor sees the results in a dashboard.</a:t>
+              <a:t>Every question is scored, and the professor sees it all in one place.</a:t>
             </a:r>
           </a:p>
         </p:txBody>
@@ -2146,7 +2146,7 @@
           <a:lstStyle/>
           <a:p>
             <a:r>
-              <a:t>By mid-November, five students complete full spoken sessions, graded like any other.</a:t>
+              <a:t>And by the middle of November, five students hold full spoken sessions, graded like everyone else.</a:t>
             </a:r>
           </a:p>
         </p:txBody>
@@ -2216,7 +2216,7 @@
           <a:lstStyle/>
           <a:p>
             <a:r>
-              <a:t>Voice-only ships in September either way. That is what makes the ambitious part safe.</a:t>
+              <a:t>The voice version ships in September no matter what. That's what makes the ambitious half safe.</a:t>
             </a:r>
           </a:p>
         </p:txBody>
@@ -2286,7 +2286,7 @@
           <a:lstStyle/>
           <a:p>
             <a:r>
-              <a:t>Here is what finished looks like. A professor grades from a web address — no laptop.</a:t>
+              <a:t>So picture December. A professor grading from a web address. No laptop, no help.</a:t>
             </a:r>
           </a:p>
         </p:txBody>
@@ -2356,7 +2356,7 @@
           <a:lstStyle/>
           <a:p>
             <a:r>
-              <a:t>Deployments are automatic; a bad change is caught before it ships.</a:t>
+              <a:t>Deployments that run themselves, so a bad change never reaches a student.</a:t>
             </a:r>
           </a:p>
         </p:txBody>
@@ -2426,7 +2426,7 @@
           <a:lstStyle/>
           <a:p>
             <a:r>
-              <a:t>And we know, from the scoring system we already have, whether talking to an avatar makes better advisors. That may come back negative. We publish either way.</a:t>
+              <a:t>And real evidence about whether talking to a face makes better advisors. It might not. We publish either way.</a:t>
             </a:r>
           </a:p>
         </p:txBody>
@@ -2496,7 +2496,7 @@
           <a:lstStyle/>
           <a:p>
             <a:r>
-              <a:t>The goal is not to finish this system. It is to leave one where the interesting work is the teaching, not the plumbing.</a:t>
+              <a:t>Because we're not here just to finish a system. We're here to leave one where the interesting work is the teaching, not the plumbing.</a:t>
             </a:r>
           </a:p>
         </p:txBody>
@@ -2566,7 +2566,7 @@
           <a:lstStyle/>
           <a:p>
             <a:r>
-              <a:t>The point is scale: unlimited practice at any hour, without booking a human role-player.</a:t>
+              <a:t>And that's the real gift. Practice at midnight, a hundred times, with nobody's schedule to book.</a:t>
             </a:r>
           </a:p>
         </p:txBody>
@@ -2636,7 +2636,7 @@
           <a:lstStyle/>
           <a:p>
             <a:r>
-              <a:t>It works today. Students use it. But three things hurt. We are three versions behind the software we run on, and catching up gets harder.</a:t>
+              <a:t>It works. Students use it today. But three things hold it back. We're three versions behind the software underneath, and the gap grows monthly.</a:t>
             </a:r>
           </a:p>
         </p:txBody>
@@ -2706,7 +2706,7 @@
           <a:lstStyle/>
           <a:p>
             <a:r>
-              <a:t>The professor's grading tool runs on a laptop. Using it takes a terminal and a developer.</a:t>
+              <a:t>The professor's grading tool only runs on a laptop, and takes a terminal and a developer.</a:t>
             </a:r>
           </a:p>
         </p:txBody>
@@ -2776,7 +2776,7 @@
           <a:lstStyle/>
           <a:p>
             <a:r>
-              <a:t>And every deployment needs manual steps people forget, so things break quietly.</a:t>
+              <a:t>And every deployment leans on steps someone has to remember. Sometimes they don't.</a:t>
             </a:r>
           </a:p>
         </p:txBody>
@@ -2846,7 +2846,7 @@
           <a:lstStyle/>
           <a:p>
             <a:r>
-              <a:t>That is the gap between a system that works and one you can hand over.</a:t>
+              <a:t>None of it's glamorous. But it's the distance between a system that works and one you can hand over.</a:t>
             </a:r>
           </a:p>
         </p:txBody>
@@ -2916,7 +2916,7 @@
           <a:lstStyle/>
           <a:p>
             <a:r>
-              <a:t>One rule governs everything. We never modify the core of Open WebUI, the platform underneath.</a:t>
+              <a:t>One rule shapes everything: we never touch the core of Open Web U-I, the platform underneath.</a:t>
             </a:r>
           </a:p>
         </p:txBody>

--- a/capstone_fall2026/slides/familyfinancechat-fall2026-heygen.pptx
+++ b/capstone_fall2026/slides/familyfinancechat-fall2026-heygen.pptx
@@ -40,6 +40,7 @@
     <p:sldId id="288" r:id="rId40"/>
     <p:sldId id="289" r:id="rId41"/>
     <p:sldId id="290" r:id="rId42"/>
+    <p:sldId id="291" r:id="rId43"/>
   </p:sldIdLst>
   <p:sldSz cx="12191695" cy="6858000" type="screen4x3"/>
   <p:notesSz cx="6858000" cy="9144000"/>
@@ -536,7 +537,7 @@
           <a:lstStyle/>
           <a:p>
             <a:r>
-              <a:t>This is Family Finance Chat. Two jobs this semester: make it solid, and give it a face.</a:t>
+              <a:t>This is Family Finance Chat, directed by Professor Mark Fedenia, and headed for a spring class in Wealth Management and Financial Planning.</a:t>
             </a:r>
           </a:p>
         </p:txBody>
@@ -606,7 +607,7 @@
           <a:lstStyle/>
           <a:p>
             <a:r>
-              <a:t>The last team learned the hard way. Six and a half thousand lines of copied code, frozen on one old version. They deleted it all. Ours is one line.</a:t>
+              <a:t>One rule shapes everything: we never touch the core of Open Web U-I, the platform underneath.</a:t>
             </a:r>
           </a:p>
         </p:txBody>
@@ -676,7 +677,7 @@
           <a:lstStyle/>
           <a:p>
             <a:r>
-              <a:t>Before we build anything we ask: if they shipped a release tomorrow, would we still work?</a:t>
+              <a:t>We learned this the hard way. Six and a half thousand lines of copied code, frozen on one old version. They deleted it all. Ours is one line.</a:t>
             </a:r>
           </a:p>
         </p:txBody>
@@ -746,7 +747,7 @@
           <a:lstStyle/>
           <a:p>
             <a:r>
-              <a:t>The first job is what the course depends on. Upgrade to current, one careful step at a time. These rewrite the database. There's no undo.</a:t>
+              <a:t>Before we build anything we ask: if they shipped a release tomorrow, would we still work?</a:t>
             </a:r>
           </a:p>
         </p:txBody>
@@ -816,7 +817,7 @@
           <a:lstStyle/>
           <a:p>
             <a:r>
-              <a:t>Give the professor a web address. No laptop, no terminal, no developer.</a:t>
+              <a:t>The first job is what the course depends on. Upgrade to current, one careful step at a time. These rewrite the database. There's no undo.</a:t>
             </a:r>
           </a:p>
         </p:txBody>
@@ -886,7 +887,7 @@
           <a:lstStyle/>
           <a:p>
             <a:r>
-              <a:t>Automate the testing, so a bad change is caught by us, not a student.</a:t>
+              <a:t>Give the professor a web address. No laptop, no terminal, no developer.</a:t>
             </a:r>
           </a:p>
         </p:txBody>
@@ -956,7 +957,7 @@
           <a:lstStyle/>
           <a:p>
             <a:r>
-              <a:t>And clear out the last of that old fork, so nobody drags it back.</a:t>
+              <a:t>Automate the testing, so a bad change is caught by us, not a student.</a:t>
             </a:r>
           </a:p>
         </p:txBody>
@@ -1026,7 +1027,7 @@
           <a:lstStyle/>
           <a:p>
             <a:r>
-              <a:t>Now the part we're excited about. Today, the student types.</a:t>
+              <a:t>And clear out the last of that old fork, so nobody drags it back.</a:t>
             </a:r>
           </a:p>
         </p:txBody>
@@ -1096,7 +1097,7 @@
           <a:lstStyle/>
           <a:p>
             <a:r>
-              <a:t>We want them to speak. To a face that listens and answers out loud, in character.</a:t>
+              <a:t>Now the part we're excited about. Today, the student types.</a:t>
             </a:r>
           </a:p>
         </p:txBody>
@@ -1166,7 +1167,7 @@
           <a:lstStyle/>
           <a:p>
             <a:r>
-              <a:t>Because soon they'll sit with a real family, asking the hardest question out loud, once, while everyone watches. You can't rehearse that with a backspace key.</a:t>
+              <a:t>We want them to speak. To a face that listens and answers out loud, in character.</a:t>
             </a:r>
           </a:p>
         </p:txBody>
@@ -1236,7 +1237,7 @@
           <a:lstStyle/>
           <a:p>
             <a:r>
-              <a:t>So how do we add a face without breaking our rule?</a:t>
+              <a:t>Because soon they'll sit with a real family, asking the hardest question out loud, once, while everyone watches. You can't rehearse that with a backspace key.</a:t>
             </a:r>
           </a:p>
         </p:txBody>
@@ -1306,7 +1307,7 @@
           <a:lstStyle/>
           <a:p>
             <a:r>
-              <a:t>Picture a student practising a hard conversation about money. Across from them, an A-I family built from the course documents. It never invents facts.</a:t>
+              <a:t>Two jobs this semester: make it solid, and give it a face.</a:t>
             </a:r>
           </a:p>
         </p:txBody>
@@ -1376,7 +1377,7 @@
           <a:lstStyle/>
           <a:p>
             <a:r>
-              <a:t>We don't build it inside the platform. We build it alongside. Its own container.</a:t>
+              <a:t>So how do we add a face without breaking our rule?</a:t>
             </a:r>
           </a:p>
         </p:txBody>
@@ -1446,7 +1447,7 @@
           <a:lstStyle/>
           <a:p>
             <a:r>
-              <a:t>The student talks to it, it asks Open Web U-I for the answer, and the platform never notices. Same brain, same grading.</a:t>
+              <a:t>We don't build it inside the platform. We build it alongside. Its own container.</a:t>
             </a:r>
           </a:p>
         </p:txBody>
@@ -1516,7 +1517,7 @@
           <a:lstStyle/>
           <a:p>
             <a:r>
-              <a:t>And if it doesn't pan out, we delete one container. The rule didn't limit the design. It gave us a better one.</a:t>
+              <a:t>The student talks to it, it asks Open Web U-I for the answer, and the platform never notices.</a:t>
             </a:r>
           </a:p>
         </p:txBody>
@@ -1586,7 +1587,7 @@
           <a:lstStyle/>
           <a:p>
             <a:r>
-              <a:t>Three numbers tell us whether this is real. Speed. It answers in about one point two seconds, or it stops feeling like a conversation.</a:t>
+              <a:t>And if it doesn't pan out, we delete one container. The rule didn't limit the design. It gave us a better one.</a:t>
             </a:r>
           </a:p>
         </p:txBody>
@@ -1656,7 +1657,7 @@
           <a:lstStyle/>
           <a:p>
             <a:r>
-              <a:t>Cost. Around four hundred dollars a semester for a class of forty, capped so it can't surprise us.</a:t>
+              <a:t>Three numbers tell us if this is real. Speed. It answers in about one point two seconds, or it stops feeling like a conversation.</a:t>
             </a:r>
           </a:p>
         </p:txBody>
@@ -1726,7 +1727,7 @@
           <a:lstStyle/>
           <a:p>
             <a:r>
-              <a:t>And permission. A student's voice and face are protected records. Consent is settled in week two.</a:t>
+              <a:t>Cost. Around four hundred dollars a semester for a class of forty, with a firm cap.</a:t>
             </a:r>
           </a:p>
         </p:txBody>
@@ -1796,7 +1797,7 @@
           <a:lstStyle/>
           <a:p>
             <a:r>
-              <a:t>If any one fails, we stop. And stopping is a perfectly good answer.</a:t>
+              <a:t>And permission. A student's voice and face are protected records. Consent is settled in week two.</a:t>
             </a:r>
           </a:p>
         </p:txBody>
@@ -1866,7 +1867,7 @@
           <a:lstStyle/>
           <a:p>
             <a:r>
-              <a:t>By late September, students can talk to it. Voice only, no face yet.</a:t>
+              <a:t>If any one fails, we stop. And stopping is a perfectly good answer.</a:t>
             </a:r>
           </a:p>
         </p:txBody>
@@ -1936,7 +1937,7 @@
           <a:lstStyle/>
           <a:p>
             <a:r>
-              <a:t>By the twentieth of October, we pick an avatar provider, or decide not to.</a:t>
+              <a:t>By late September, students can talk to it. Voice only, no face yet.</a:t>
             </a:r>
           </a:p>
         </p:txBody>
@@ -2006,7 +2007,7 @@
           <a:lstStyle/>
           <a:p>
             <a:r>
-              <a:t>A week later, the platform is current.</a:t>
+              <a:t>By the twentieth of October, we pick an avatar provider, or stop.</a:t>
             </a:r>
           </a:p>
         </p:txBody>
@@ -2076,7 +2077,7 @@
           <a:lstStyle/>
           <a:p>
             <a:r>
-              <a:t>Every question is scored, and the professor sees it all in one place.</a:t>
+              <a:t>Picture a student practising a hard conversation about money. Across from them, an A-I family built from the course documents. It never invents facts.</a:t>
             </a:r>
           </a:p>
         </p:txBody>
@@ -2146,7 +2147,7 @@
           <a:lstStyle/>
           <a:p>
             <a:r>
-              <a:t>And by the middle of November, five students hold full spoken sessions, graded like everyone else.</a:t>
+              <a:t>A week later, the platform is current.</a:t>
             </a:r>
           </a:p>
         </p:txBody>
@@ -2216,7 +2217,7 @@
           <a:lstStyle/>
           <a:p>
             <a:r>
-              <a:t>The voice version ships in September no matter what. That's what makes the ambitious half safe.</a:t>
+              <a:t>And by the middle of November, five students hold full spoken sessions, graded normally.</a:t>
             </a:r>
           </a:p>
         </p:txBody>
@@ -2286,7 +2287,7 @@
           <a:lstStyle/>
           <a:p>
             <a:r>
-              <a:t>So picture December. A professor grading from a web address. No laptop, no help.</a:t>
+              <a:t>The voice version ships in September no matter what. That's what makes the ambitious half safe.</a:t>
             </a:r>
           </a:p>
         </p:txBody>
@@ -2356,7 +2357,7 @@
           <a:lstStyle/>
           <a:p>
             <a:r>
-              <a:t>Deployments that run themselves, so a bad change never reaches a student.</a:t>
+              <a:t>So picture December. A professor grading from a web address. No laptop.</a:t>
             </a:r>
           </a:p>
         </p:txBody>
@@ -2426,7 +2427,7 @@
           <a:lstStyle/>
           <a:p>
             <a:r>
-              <a:t>And real evidence about whether talking to a face makes better advisors. It might not. We publish either way.</a:t>
+              <a:t>Deployments that run themselves, so a bad change never reaches a student.</a:t>
             </a:r>
           </a:p>
         </p:txBody>
@@ -2496,7 +2497,7 @@
           <a:lstStyle/>
           <a:p>
             <a:r>
-              <a:t>Because we're not here just to finish a system. We're here to leave one where the interesting work is the teaching, not the plumbing.</a:t>
+              <a:t>And real evidence about whether talking to a face makes better advisors. It might not. We publish either way.</a:t>
             </a:r>
           </a:p>
         </p:txBody>
@@ -2521,7 +2522,7 @@
 </p:notes>
 </file>
 
-<file path=ppt/notesSlides/notesSlide4.xml><?xml version="1.0" encoding="utf-8"?>
+<file path=ppt/notesSlides/notesSlide36.xml><?xml version="1.0" encoding="utf-8"?>
 <p:notes xmlns:a="http://schemas.openxmlformats.org/drawingml/2006/main" xmlns:p="http://schemas.openxmlformats.org/presentationml/2006/main" xmlns:r="http://schemas.openxmlformats.org/officeDocument/2006/relationships">
   <p:cSld>
     <p:spTree>
@@ -2566,7 +2567,7 @@
           <a:lstStyle/>
           <a:p>
             <a:r>
-              <a:t>And that's the real gift. Practice at midnight, a hundred times, with nobody's schedule to book.</a:t>
+              <a:t>Because we're not here just to finish a system. We're here to leave one where the interesting work is the teaching, not the plumbing.</a:t>
             </a:r>
           </a:p>
         </p:txBody>
@@ -2591,7 +2592,7 @@
 </p:notes>
 </file>
 
-<file path=ppt/notesSlides/notesSlide5.xml><?xml version="1.0" encoding="utf-8"?>
+<file path=ppt/notesSlides/notesSlide4.xml><?xml version="1.0" encoding="utf-8"?>
 <p:notes xmlns:a="http://schemas.openxmlformats.org/drawingml/2006/main" xmlns:p="http://schemas.openxmlformats.org/presentationml/2006/main" xmlns:r="http://schemas.openxmlformats.org/officeDocument/2006/relationships">
   <p:cSld>
     <p:spTree>
@@ -2636,7 +2637,7 @@
           <a:lstStyle/>
           <a:p>
             <a:r>
-              <a:t>It works. Students use it today. But three things hold it back. We're three versions behind the software underneath, and the gap grows monthly.</a:t>
+              <a:t>Every question is scored, and the professor sees it all in one place.</a:t>
             </a:r>
           </a:p>
         </p:txBody>
@@ -2661,7 +2662,7 @@
 </p:notes>
 </file>
 
-<file path=ppt/notesSlides/notesSlide6.xml><?xml version="1.0" encoding="utf-8"?>
+<file path=ppt/notesSlides/notesSlide5.xml><?xml version="1.0" encoding="utf-8"?>
 <p:notes xmlns:a="http://schemas.openxmlformats.org/drawingml/2006/main" xmlns:p="http://schemas.openxmlformats.org/presentationml/2006/main" xmlns:r="http://schemas.openxmlformats.org/officeDocument/2006/relationships">
   <p:cSld>
     <p:spTree>
@@ -2706,7 +2707,7 @@
           <a:lstStyle/>
           <a:p>
             <a:r>
-              <a:t>The professor's grading tool only runs on a laptop, and takes a terminal and a developer.</a:t>
+              <a:t>And that's the real gift. Practice at midnight, a hundred times, no schedule to book.</a:t>
             </a:r>
           </a:p>
         </p:txBody>
@@ -2731,7 +2732,7 @@
 </p:notes>
 </file>
 
-<file path=ppt/notesSlides/notesSlide7.xml><?xml version="1.0" encoding="utf-8"?>
+<file path=ppt/notesSlides/notesSlide6.xml><?xml version="1.0" encoding="utf-8"?>
 <p:notes xmlns:a="http://schemas.openxmlformats.org/drawingml/2006/main" xmlns:p="http://schemas.openxmlformats.org/presentationml/2006/main" xmlns:r="http://schemas.openxmlformats.org/officeDocument/2006/relationships">
   <p:cSld>
     <p:spTree>
@@ -2776,7 +2777,7 @@
           <a:lstStyle/>
           <a:p>
             <a:r>
-              <a:t>And every deployment leans on steps someone has to remember. Sometimes they don't.</a:t>
+              <a:t>It works. Students use it today. But three things hold it back. We're three versions behind the software underneath, and falling further.</a:t>
             </a:r>
           </a:p>
         </p:txBody>
@@ -2801,7 +2802,7 @@
 </p:notes>
 </file>
 
-<file path=ppt/notesSlides/notesSlide8.xml><?xml version="1.0" encoding="utf-8"?>
+<file path=ppt/notesSlides/notesSlide7.xml><?xml version="1.0" encoding="utf-8"?>
 <p:notes xmlns:a="http://schemas.openxmlformats.org/drawingml/2006/main" xmlns:p="http://schemas.openxmlformats.org/presentationml/2006/main" xmlns:r="http://schemas.openxmlformats.org/officeDocument/2006/relationships">
   <p:cSld>
     <p:spTree>
@@ -2846,7 +2847,7 @@
           <a:lstStyle/>
           <a:p>
             <a:r>
-              <a:t>None of it's glamorous. But it's the distance between a system that works and one you can hand over.</a:t>
+              <a:t>The professor's grading tool only runs on a laptop, and takes a terminal and a developer.</a:t>
             </a:r>
           </a:p>
         </p:txBody>
@@ -2871,7 +2872,7 @@
 </p:notes>
 </file>
 
-<file path=ppt/notesSlides/notesSlide9.xml><?xml version="1.0" encoding="utf-8"?>
+<file path=ppt/notesSlides/notesSlide8.xml><?xml version="1.0" encoding="utf-8"?>
 <p:notes xmlns:a="http://schemas.openxmlformats.org/drawingml/2006/main" xmlns:p="http://schemas.openxmlformats.org/presentationml/2006/main" xmlns:r="http://schemas.openxmlformats.org/officeDocument/2006/relationships">
   <p:cSld>
     <p:spTree>
@@ -2916,7 +2917,77 @@
           <a:lstStyle/>
           <a:p>
             <a:r>
-              <a:t>One rule shapes everything: we never touch the core of Open Web U-I, the platform underneath.</a:t>
+              <a:t>And every deployment leans on steps someone has to remember. Sometimes they don't.</a:t>
+            </a:r>
+          </a:p>
+        </p:txBody>
+      </p:sp>
+      <p:sp>
+        <p:nvSpPr>
+          <p:cNvPr id="4" name="Slide Number Placeholder 3"/>
+          <p:cNvSpPr>
+            <a:spLocks noGrp="1"/>
+          </p:cNvSpPr>
+          <p:nvPr>
+            <p:ph type="sldNum" idx="5" sz="quarter"/>
+          </p:nvPr>
+        </p:nvSpPr>
+        <p:spPr/>
+      </p:sp>
+    </p:spTree>
+  </p:cSld>
+  <p:clrMapOvr>
+    <a:masterClrMapping/>
+  </p:clrMapOvr>
+</p:notes>
+</file>
+
+<file path=ppt/notesSlides/notesSlide9.xml><?xml version="1.0" encoding="utf-8"?>
+<p:notes xmlns:a="http://schemas.openxmlformats.org/drawingml/2006/main" xmlns:p="http://schemas.openxmlformats.org/presentationml/2006/main" xmlns:r="http://schemas.openxmlformats.org/officeDocument/2006/relationships">
+  <p:cSld>
+    <p:spTree>
+      <p:nvGrpSpPr>
+        <p:cNvPr id="1" name=""/>
+        <p:cNvGrpSpPr/>
+        <p:nvPr/>
+      </p:nvGrpSpPr>
+      <p:grpSpPr>
+        <a:xfrm>
+          <a:off x="0" y="0"/>
+          <a:ext cx="0" cy="0"/>
+          <a:chOff x="0" y="0"/>
+          <a:chExt cx="0" cy="0"/>
+        </a:xfrm>
+      </p:grpSpPr>
+      <p:sp>
+        <p:nvSpPr>
+          <p:cNvPr id="2" name="Slide Image Placeholder 1"/>
+          <p:cNvSpPr>
+            <a:spLocks noGrp="1"/>
+          </p:cNvSpPr>
+          <p:nvPr>
+            <p:ph type="sldImg" idx="2"/>
+          </p:nvPr>
+        </p:nvSpPr>
+        <p:spPr/>
+      </p:sp>
+      <p:sp>
+        <p:nvSpPr>
+          <p:cNvPr id="3" name="Notes Placeholder 2"/>
+          <p:cNvSpPr>
+            <a:spLocks noGrp="1"/>
+          </p:cNvSpPr>
+          <p:nvPr>
+            <p:ph type="body" idx="3" sz="quarter"/>
+          </p:nvPr>
+        </p:nvSpPr>
+        <p:spPr/>
+        <p:txBody>
+          <a:bodyPr/>
+          <a:lstStyle/>
+          <a:p>
+            <a:r>
+              <a:t>None of it's glamorous. But it's the distance between a system that works and one you can hand over.</a:t>
             </a:r>
           </a:p>
         </p:txBody>
@@ -7101,6 +7172,48 @@
       <p:pic>
         <p:nvPicPr>
           <p:cNvPr id="2" name="Picture 1" descr="slide-35.png"/>
+          <p:cNvPicPr>
+            <a:picLocks noChangeAspect="1"/>
+          </p:cNvPicPr>
+          <p:nvPr/>
+        </p:nvPicPr>
+        <p:blipFill>
+          <a:blip r:embed="rId2"/>
+          <a:stretch>
+            <a:fillRect/>
+          </a:stretch>
+        </p:blipFill>
+        <p:spPr>
+          <a:xfrm>
+            <a:off x="0" y="0"/>
+            <a:ext cx="12191695" cy="6858000"/>
+          </a:xfrm>
+          <a:prstGeom prst="rect">
+            <a:avLst/>
+          </a:prstGeom>
+        </p:spPr>
+      </p:pic>
+    </p:spTree>
+  </p:cSld>
+  <p:clrMapOvr>
+    <a:masterClrMapping/>
+  </p:clrMapOvr>
+</p:sld>
+</file>
+
+<file path=ppt/slides/slide36.xml><?xml version="1.0" encoding="utf-8"?>
+<p:sld xmlns:a="http://schemas.openxmlformats.org/drawingml/2006/main" xmlns:p="http://schemas.openxmlformats.org/presentationml/2006/main" xmlns:r="http://schemas.openxmlformats.org/officeDocument/2006/relationships">
+  <p:cSld>
+    <p:spTree>
+      <p:nvGrpSpPr>
+        <p:cNvPr id="1" name=""/>
+        <p:cNvGrpSpPr/>
+        <p:nvPr/>
+      </p:nvGrpSpPr>
+      <p:grpSpPr/>
+      <p:pic>
+        <p:nvPicPr>
+          <p:cNvPr id="2" name="Picture 1" descr="slide-36.png"/>
           <p:cNvPicPr>
             <a:picLocks noChangeAspect="1"/>
           </p:cNvPicPr>

--- a/capstone_fall2026/slides/familyfinancechat-fall2026-heygen.pptx
+++ b/capstone_fall2026/slides/familyfinancechat-fall2026-heygen.pptx
@@ -32,15 +32,6 @@
     <p:sldId id="280" r:id="rId32"/>
     <p:sldId id="281" r:id="rId33"/>
     <p:sldId id="282" r:id="rId34"/>
-    <p:sldId id="283" r:id="rId35"/>
-    <p:sldId id="284" r:id="rId36"/>
-    <p:sldId id="285" r:id="rId37"/>
-    <p:sldId id="286" r:id="rId38"/>
-    <p:sldId id="287" r:id="rId39"/>
-    <p:sldId id="288" r:id="rId40"/>
-    <p:sldId id="289" r:id="rId41"/>
-    <p:sldId id="290" r:id="rId42"/>
-    <p:sldId id="291" r:id="rId43"/>
   </p:sldIdLst>
   <p:sldSz cx="12191695" cy="6858000" type="screen4x3"/>
   <p:notesSz cx="6858000" cy="9144000"/>
@@ -537,7 +528,7 @@
           <a:lstStyle/>
           <a:p>
             <a:r>
-              <a:t>This is Family Finance Chat, directed by Professor Mark Fedenia, and headed for a spring class in Wealth Management and Financial Planning.</a:t>
+              <a:t>Hi. I'm Mark Fedenia. I teach finance at Wisconsin, and I want to show you something my students use, and where I'd like to take it next.</a:t>
             </a:r>
           </a:p>
         </p:txBody>
@@ -607,7 +598,7 @@
           <a:lstStyle/>
           <a:p>
             <a:r>
-              <a:t>One rule shapes everything: we never touch the core of Open Web U-I, the platform underneath.</a:t>
+              <a:t>The second is the one I'm excited about. I want the student to stop typing.</a:t>
             </a:r>
           </a:p>
         </p:txBody>
@@ -677,7 +668,7 @@
           <a:lstStyle/>
           <a:p>
             <a:r>
-              <a:t>We learned this the hard way. Six and a half thousand lines of copied code, frozen on one old version. They deleted it all. Ours is one line.</a:t>
+              <a:t>So, the groundwork. Get current with the platform, and stay current, so upgrades stop being frightening.</a:t>
             </a:r>
           </a:p>
         </p:txBody>
@@ -747,7 +738,7 @@
           <a:lstStyle/>
           <a:p>
             <a:r>
-              <a:t>Before we build anything we ask: if they shipped a release tomorrow, would we still work?</a:t>
+              <a:t>Put the grading on the web where any instructor can open it, instead of on one laptop in my office.</a:t>
             </a:r>
           </a:p>
         </p:txBody>
@@ -817,7 +808,7 @@
           <a:lstStyle/>
           <a:p>
             <a:r>
-              <a:t>The first job is what the course depends on. Upgrade to current, one careful step at a time. These rewrite the database. There's no undo.</a:t>
+              <a:t>And make deployment automatic, so improving this thing doesn't depend on one person remembering the steps.</a:t>
             </a:r>
           </a:p>
         </p:txBody>
@@ -887,7 +878,7 @@
           <a:lstStyle/>
           <a:p>
             <a:r>
-              <a:t>Give the professor a web address. No laptop, no terminal, no developer.</a:t>
+              <a:t>Now the interesting part. Right now a student types a question and reads an answer, which is nothing like the job.</a:t>
             </a:r>
           </a:p>
         </p:txBody>
@@ -957,7 +948,7 @@
           <a:lstStyle/>
           <a:p>
             <a:r>
-              <a:t>Automate the testing, so a bad change is caught by us, not a student.</a:t>
+              <a:t>I want them to say it out loud, to a face that listens, waits, and answers back in character.</a:t>
             </a:r>
           </a:p>
         </p:txBody>
@@ -1027,7 +1018,7 @@
           <a:lstStyle/>
           <a:p>
             <a:r>
-              <a:t>And clear out the last of that old fork, so nobody drags it back.</a:t>
+              <a:t>Because in a real meeting you get one shot. You ask the hard question out loud, once, while a family watches your face.</a:t>
             </a:r>
           </a:p>
         </p:txBody>
@@ -1097,7 +1088,7 @@
           <a:lstStyle/>
           <a:p>
             <a:r>
-              <a:t>Now the part we're excited about. Today, the student types.</a:t>
+              <a:t>You can't practise that with a keyboard. There's no backspace key in that room.</a:t>
             </a:r>
           </a:p>
         </p:txBody>
@@ -1167,7 +1158,7 @@
           <a:lstStyle/>
           <a:p>
             <a:r>
-              <a:t>We want them to speak. To a face that listens and answers out loud, in character.</a:t>
+              <a:t>So here's the actual project. There are a dozen companies now doing real time avatars, and none of them have been tested for something like this. Somebody has to find out which one holds up.</a:t>
             </a:r>
           </a:p>
         </p:txBody>
@@ -1237,7 +1228,7 @@
           <a:lstStyle/>
           <a:p>
             <a:r>
-              <a:t>Because soon they'll sit with a real family, asking the hardest question out loud, once, while everyone watches. You can't rehearse that with a backspace key.</a:t>
+              <a:t>Speed matters most. If it takes longer than about a second to answer, it stops feeling like a conversation and starts feeling like a machine.</a:t>
             </a:r>
           </a:p>
         </p:txBody>
@@ -1307,7 +1298,7 @@
           <a:lstStyle/>
           <a:p>
             <a:r>
-              <a:t>Two jobs this semester: make it solid, and give it a face.</a:t>
+              <a:t>It's called Family Finance Chat, and right now it's a chat box. By the end of this project, I want it to be a face you talk to.</a:t>
             </a:r>
           </a:p>
         </p:txBody>
@@ -1377,7 +1368,7 @@
           <a:lstStyle/>
           <a:p>
             <a:r>
-              <a:t>So how do we add a face without breaking our rule?</a:t>
+              <a:t>Then cost, per student, per semester, with a ceiling we can actually live with.</a:t>
             </a:r>
           </a:p>
         </p:txBody>
@@ -1447,7 +1438,7 @@
           <a:lstStyle/>
           <a:p>
             <a:r>
-              <a:t>We don't build it inside the platform. We build it alongside. Its own container.</a:t>
+              <a:t>And permission, because a student's voice and face are protected records, and that gets settled before anyone records anything.</a:t>
             </a:r>
           </a:p>
         </p:txBody>
@@ -1517,7 +1508,7 @@
           <a:lstStyle/>
           <a:p>
             <a:r>
-              <a:t>The student talks to it, it asks Open Web U-I for the answer, and the platform never notices.</a:t>
+              <a:t>Whatever wins has to bolt on beside what we already have, not replace it.</a:t>
             </a:r>
           </a:p>
         </p:txBody>
@@ -1587,7 +1578,7 @@
           <a:lstStyle/>
           <a:p>
             <a:r>
-              <a:t>And if it doesn't pan out, we delete one container. The rule didn't limit the design. It gave us a better one.</a:t>
+              <a:t>A separate service that handles the talking.</a:t>
             </a:r>
           </a:p>
         </p:txBody>
@@ -1657,7 +1648,7 @@
           <a:lstStyle/>
           <a:p>
             <a:r>
-              <a:t>Three numbers tell us if this is real. Speed. It answers in about one point two seconds, or it stops feeling like a conversation.</a:t>
+              <a:t>It asks the existing system for the answer, so the grading and the course material keep working exactly as they do now. And if it turns out not to be worth it, we switch it off and lose nothing.</a:t>
             </a:r>
           </a:p>
         </p:txBody>
@@ -1727,7 +1718,7 @@
           <a:lstStyle/>
           <a:p>
             <a:r>
-              <a:t>Cost. Around four hundred dollars a semester for a class of forty, with a firm cap.</a:t>
+              <a:t>What I want by the end of the term is students actually talking to this thing.</a:t>
             </a:r>
           </a:p>
         </p:txBody>
@@ -1797,7 +1788,7 @@
           <a:lstStyle/>
           <a:p>
             <a:r>
-              <a:t>And permission. A student's voice and face are protected records. Consent is settled in week two.</a:t>
+              <a:t>And I want to know whether it makes them better at the job. Measured, not guessed.</a:t>
             </a:r>
           </a:p>
         </p:txBody>
@@ -1867,147 +1858,7 @@
           <a:lstStyle/>
           <a:p>
             <a:r>
-              <a:t>If any one fails, we stop. And stopping is a perfectly good answer.</a:t>
-            </a:r>
-          </a:p>
-        </p:txBody>
-      </p:sp>
-      <p:sp>
-        <p:nvSpPr>
-          <p:cNvPr id="4" name="Slide Number Placeholder 3"/>
-          <p:cNvSpPr>
-            <a:spLocks noGrp="1"/>
-          </p:cNvSpPr>
-          <p:nvPr>
-            <p:ph type="sldNum" idx="5" sz="quarter"/>
-          </p:nvPr>
-        </p:nvSpPr>
-        <p:spPr/>
-      </p:sp>
-    </p:spTree>
-  </p:cSld>
-  <p:clrMapOvr>
-    <a:masterClrMapping/>
-  </p:clrMapOvr>
-</p:notes>
-</file>
-
-<file path=ppt/notesSlides/notesSlide28.xml><?xml version="1.0" encoding="utf-8"?>
-<p:notes xmlns:a="http://schemas.openxmlformats.org/drawingml/2006/main" xmlns:p="http://schemas.openxmlformats.org/presentationml/2006/main" xmlns:r="http://schemas.openxmlformats.org/officeDocument/2006/relationships">
-  <p:cSld>
-    <p:spTree>
-      <p:nvGrpSpPr>
-        <p:cNvPr id="1" name=""/>
-        <p:cNvGrpSpPr/>
-        <p:nvPr/>
-      </p:nvGrpSpPr>
-      <p:grpSpPr>
-        <a:xfrm>
-          <a:off x="0" y="0"/>
-          <a:ext cx="0" cy="0"/>
-          <a:chOff x="0" y="0"/>
-          <a:chExt cx="0" cy="0"/>
-        </a:xfrm>
-      </p:grpSpPr>
-      <p:sp>
-        <p:nvSpPr>
-          <p:cNvPr id="2" name="Slide Image Placeholder 1"/>
-          <p:cNvSpPr>
-            <a:spLocks noGrp="1"/>
-          </p:cNvSpPr>
-          <p:nvPr>
-            <p:ph type="sldImg" idx="2"/>
-          </p:nvPr>
-        </p:nvSpPr>
-        <p:spPr/>
-      </p:sp>
-      <p:sp>
-        <p:nvSpPr>
-          <p:cNvPr id="3" name="Notes Placeholder 2"/>
-          <p:cNvSpPr>
-            <a:spLocks noGrp="1"/>
-          </p:cNvSpPr>
-          <p:nvPr>
-            <p:ph type="body" idx="3" sz="quarter"/>
-          </p:nvPr>
-        </p:nvSpPr>
-        <p:spPr/>
-        <p:txBody>
-          <a:bodyPr/>
-          <a:lstStyle/>
-          <a:p>
-            <a:r>
-              <a:t>By late September, students can talk to it. Voice only, no face yet.</a:t>
-            </a:r>
-          </a:p>
-        </p:txBody>
-      </p:sp>
-      <p:sp>
-        <p:nvSpPr>
-          <p:cNvPr id="4" name="Slide Number Placeholder 3"/>
-          <p:cNvSpPr>
-            <a:spLocks noGrp="1"/>
-          </p:cNvSpPr>
-          <p:nvPr>
-            <p:ph type="sldNum" idx="5" sz="quarter"/>
-          </p:nvPr>
-        </p:nvSpPr>
-        <p:spPr/>
-      </p:sp>
-    </p:spTree>
-  </p:cSld>
-  <p:clrMapOvr>
-    <a:masterClrMapping/>
-  </p:clrMapOvr>
-</p:notes>
-</file>
-
-<file path=ppt/notesSlides/notesSlide29.xml><?xml version="1.0" encoding="utf-8"?>
-<p:notes xmlns:a="http://schemas.openxmlformats.org/drawingml/2006/main" xmlns:p="http://schemas.openxmlformats.org/presentationml/2006/main" xmlns:r="http://schemas.openxmlformats.org/officeDocument/2006/relationships">
-  <p:cSld>
-    <p:spTree>
-      <p:nvGrpSpPr>
-        <p:cNvPr id="1" name=""/>
-        <p:cNvGrpSpPr/>
-        <p:nvPr/>
-      </p:nvGrpSpPr>
-      <p:grpSpPr>
-        <a:xfrm>
-          <a:off x="0" y="0"/>
-          <a:ext cx="0" cy="0"/>
-          <a:chOff x="0" y="0"/>
-          <a:chExt cx="0" cy="0"/>
-        </a:xfrm>
-      </p:grpSpPr>
-      <p:sp>
-        <p:nvSpPr>
-          <p:cNvPr id="2" name="Slide Image Placeholder 1"/>
-          <p:cNvSpPr>
-            <a:spLocks noGrp="1"/>
-          </p:cNvSpPr>
-          <p:nvPr>
-            <p:ph type="sldImg" idx="2"/>
-          </p:nvPr>
-        </p:nvSpPr>
-        <p:spPr/>
-      </p:sp>
-      <p:sp>
-        <p:nvSpPr>
-          <p:cNvPr id="3" name="Notes Placeholder 2"/>
-          <p:cNvSpPr>
-            <a:spLocks noGrp="1"/>
-          </p:cNvSpPr>
-          <p:nvPr>
-            <p:ph type="body" idx="3" sz="quarter"/>
-          </p:nvPr>
-        </p:nvSpPr>
-        <p:spPr/>
-        <p:txBody>
-          <a:bodyPr/>
-          <a:lstStyle/>
-          <a:p>
-            <a:r>
-              <a:t>By the twentieth of October, we pick an avatar provider, or stop.</a:t>
+              <a:t>It might turn out that it doesn't, and that's a finding worth publishing too. If that sounds like a semester well spent, come build it with us.</a:t>
             </a:r>
           </a:p>
         </p:txBody>
@@ -2077,497 +1928,7 @@
           <a:lstStyle/>
           <a:p>
             <a:r>
-              <a:t>Picture a student practising a hard conversation about money. Across from them, an A-I family built from the course documents. It never invents facts.</a:t>
-            </a:r>
-          </a:p>
-        </p:txBody>
-      </p:sp>
-      <p:sp>
-        <p:nvSpPr>
-          <p:cNvPr id="4" name="Slide Number Placeholder 3"/>
-          <p:cNvSpPr>
-            <a:spLocks noGrp="1"/>
-          </p:cNvSpPr>
-          <p:nvPr>
-            <p:ph type="sldNum" idx="5" sz="quarter"/>
-          </p:nvPr>
-        </p:nvSpPr>
-        <p:spPr/>
-      </p:sp>
-    </p:spTree>
-  </p:cSld>
-  <p:clrMapOvr>
-    <a:masterClrMapping/>
-  </p:clrMapOvr>
-</p:notes>
-</file>
-
-<file path=ppt/notesSlides/notesSlide30.xml><?xml version="1.0" encoding="utf-8"?>
-<p:notes xmlns:a="http://schemas.openxmlformats.org/drawingml/2006/main" xmlns:p="http://schemas.openxmlformats.org/presentationml/2006/main" xmlns:r="http://schemas.openxmlformats.org/officeDocument/2006/relationships">
-  <p:cSld>
-    <p:spTree>
-      <p:nvGrpSpPr>
-        <p:cNvPr id="1" name=""/>
-        <p:cNvGrpSpPr/>
-        <p:nvPr/>
-      </p:nvGrpSpPr>
-      <p:grpSpPr>
-        <a:xfrm>
-          <a:off x="0" y="0"/>
-          <a:ext cx="0" cy="0"/>
-          <a:chOff x="0" y="0"/>
-          <a:chExt cx="0" cy="0"/>
-        </a:xfrm>
-      </p:grpSpPr>
-      <p:sp>
-        <p:nvSpPr>
-          <p:cNvPr id="2" name="Slide Image Placeholder 1"/>
-          <p:cNvSpPr>
-            <a:spLocks noGrp="1"/>
-          </p:cNvSpPr>
-          <p:nvPr>
-            <p:ph type="sldImg" idx="2"/>
-          </p:nvPr>
-        </p:nvSpPr>
-        <p:spPr/>
-      </p:sp>
-      <p:sp>
-        <p:nvSpPr>
-          <p:cNvPr id="3" name="Notes Placeholder 2"/>
-          <p:cNvSpPr>
-            <a:spLocks noGrp="1"/>
-          </p:cNvSpPr>
-          <p:nvPr>
-            <p:ph type="body" idx="3" sz="quarter"/>
-          </p:nvPr>
-        </p:nvSpPr>
-        <p:spPr/>
-        <p:txBody>
-          <a:bodyPr/>
-          <a:lstStyle/>
-          <a:p>
-            <a:r>
-              <a:t>A week later, the platform is current.</a:t>
-            </a:r>
-          </a:p>
-        </p:txBody>
-      </p:sp>
-      <p:sp>
-        <p:nvSpPr>
-          <p:cNvPr id="4" name="Slide Number Placeholder 3"/>
-          <p:cNvSpPr>
-            <a:spLocks noGrp="1"/>
-          </p:cNvSpPr>
-          <p:nvPr>
-            <p:ph type="sldNum" idx="5" sz="quarter"/>
-          </p:nvPr>
-        </p:nvSpPr>
-        <p:spPr/>
-      </p:sp>
-    </p:spTree>
-  </p:cSld>
-  <p:clrMapOvr>
-    <a:masterClrMapping/>
-  </p:clrMapOvr>
-</p:notes>
-</file>
-
-<file path=ppt/notesSlides/notesSlide31.xml><?xml version="1.0" encoding="utf-8"?>
-<p:notes xmlns:a="http://schemas.openxmlformats.org/drawingml/2006/main" xmlns:p="http://schemas.openxmlformats.org/presentationml/2006/main" xmlns:r="http://schemas.openxmlformats.org/officeDocument/2006/relationships">
-  <p:cSld>
-    <p:spTree>
-      <p:nvGrpSpPr>
-        <p:cNvPr id="1" name=""/>
-        <p:cNvGrpSpPr/>
-        <p:nvPr/>
-      </p:nvGrpSpPr>
-      <p:grpSpPr>
-        <a:xfrm>
-          <a:off x="0" y="0"/>
-          <a:ext cx="0" cy="0"/>
-          <a:chOff x="0" y="0"/>
-          <a:chExt cx="0" cy="0"/>
-        </a:xfrm>
-      </p:grpSpPr>
-      <p:sp>
-        <p:nvSpPr>
-          <p:cNvPr id="2" name="Slide Image Placeholder 1"/>
-          <p:cNvSpPr>
-            <a:spLocks noGrp="1"/>
-          </p:cNvSpPr>
-          <p:nvPr>
-            <p:ph type="sldImg" idx="2"/>
-          </p:nvPr>
-        </p:nvSpPr>
-        <p:spPr/>
-      </p:sp>
-      <p:sp>
-        <p:nvSpPr>
-          <p:cNvPr id="3" name="Notes Placeholder 2"/>
-          <p:cNvSpPr>
-            <a:spLocks noGrp="1"/>
-          </p:cNvSpPr>
-          <p:nvPr>
-            <p:ph type="body" idx="3" sz="quarter"/>
-          </p:nvPr>
-        </p:nvSpPr>
-        <p:spPr/>
-        <p:txBody>
-          <a:bodyPr/>
-          <a:lstStyle/>
-          <a:p>
-            <a:r>
-              <a:t>And by the middle of November, five students hold full spoken sessions, graded normally.</a:t>
-            </a:r>
-          </a:p>
-        </p:txBody>
-      </p:sp>
-      <p:sp>
-        <p:nvSpPr>
-          <p:cNvPr id="4" name="Slide Number Placeholder 3"/>
-          <p:cNvSpPr>
-            <a:spLocks noGrp="1"/>
-          </p:cNvSpPr>
-          <p:nvPr>
-            <p:ph type="sldNum" idx="5" sz="quarter"/>
-          </p:nvPr>
-        </p:nvSpPr>
-        <p:spPr/>
-      </p:sp>
-    </p:spTree>
-  </p:cSld>
-  <p:clrMapOvr>
-    <a:masterClrMapping/>
-  </p:clrMapOvr>
-</p:notes>
-</file>
-
-<file path=ppt/notesSlides/notesSlide32.xml><?xml version="1.0" encoding="utf-8"?>
-<p:notes xmlns:a="http://schemas.openxmlformats.org/drawingml/2006/main" xmlns:p="http://schemas.openxmlformats.org/presentationml/2006/main" xmlns:r="http://schemas.openxmlformats.org/officeDocument/2006/relationships">
-  <p:cSld>
-    <p:spTree>
-      <p:nvGrpSpPr>
-        <p:cNvPr id="1" name=""/>
-        <p:cNvGrpSpPr/>
-        <p:nvPr/>
-      </p:nvGrpSpPr>
-      <p:grpSpPr>
-        <a:xfrm>
-          <a:off x="0" y="0"/>
-          <a:ext cx="0" cy="0"/>
-          <a:chOff x="0" y="0"/>
-          <a:chExt cx="0" cy="0"/>
-        </a:xfrm>
-      </p:grpSpPr>
-      <p:sp>
-        <p:nvSpPr>
-          <p:cNvPr id="2" name="Slide Image Placeholder 1"/>
-          <p:cNvSpPr>
-            <a:spLocks noGrp="1"/>
-          </p:cNvSpPr>
-          <p:nvPr>
-            <p:ph type="sldImg" idx="2"/>
-          </p:nvPr>
-        </p:nvSpPr>
-        <p:spPr/>
-      </p:sp>
-      <p:sp>
-        <p:nvSpPr>
-          <p:cNvPr id="3" name="Notes Placeholder 2"/>
-          <p:cNvSpPr>
-            <a:spLocks noGrp="1"/>
-          </p:cNvSpPr>
-          <p:nvPr>
-            <p:ph type="body" idx="3" sz="quarter"/>
-          </p:nvPr>
-        </p:nvSpPr>
-        <p:spPr/>
-        <p:txBody>
-          <a:bodyPr/>
-          <a:lstStyle/>
-          <a:p>
-            <a:r>
-              <a:t>The voice version ships in September no matter what. That's what makes the ambitious half safe.</a:t>
-            </a:r>
-          </a:p>
-        </p:txBody>
-      </p:sp>
-      <p:sp>
-        <p:nvSpPr>
-          <p:cNvPr id="4" name="Slide Number Placeholder 3"/>
-          <p:cNvSpPr>
-            <a:spLocks noGrp="1"/>
-          </p:cNvSpPr>
-          <p:nvPr>
-            <p:ph type="sldNum" idx="5" sz="quarter"/>
-          </p:nvPr>
-        </p:nvSpPr>
-        <p:spPr/>
-      </p:sp>
-    </p:spTree>
-  </p:cSld>
-  <p:clrMapOvr>
-    <a:masterClrMapping/>
-  </p:clrMapOvr>
-</p:notes>
-</file>
-
-<file path=ppt/notesSlides/notesSlide33.xml><?xml version="1.0" encoding="utf-8"?>
-<p:notes xmlns:a="http://schemas.openxmlformats.org/drawingml/2006/main" xmlns:p="http://schemas.openxmlformats.org/presentationml/2006/main" xmlns:r="http://schemas.openxmlformats.org/officeDocument/2006/relationships">
-  <p:cSld>
-    <p:spTree>
-      <p:nvGrpSpPr>
-        <p:cNvPr id="1" name=""/>
-        <p:cNvGrpSpPr/>
-        <p:nvPr/>
-      </p:nvGrpSpPr>
-      <p:grpSpPr>
-        <a:xfrm>
-          <a:off x="0" y="0"/>
-          <a:ext cx="0" cy="0"/>
-          <a:chOff x="0" y="0"/>
-          <a:chExt cx="0" cy="0"/>
-        </a:xfrm>
-      </p:grpSpPr>
-      <p:sp>
-        <p:nvSpPr>
-          <p:cNvPr id="2" name="Slide Image Placeholder 1"/>
-          <p:cNvSpPr>
-            <a:spLocks noGrp="1"/>
-          </p:cNvSpPr>
-          <p:nvPr>
-            <p:ph type="sldImg" idx="2"/>
-          </p:nvPr>
-        </p:nvSpPr>
-        <p:spPr/>
-      </p:sp>
-      <p:sp>
-        <p:nvSpPr>
-          <p:cNvPr id="3" name="Notes Placeholder 2"/>
-          <p:cNvSpPr>
-            <a:spLocks noGrp="1"/>
-          </p:cNvSpPr>
-          <p:nvPr>
-            <p:ph type="body" idx="3" sz="quarter"/>
-          </p:nvPr>
-        </p:nvSpPr>
-        <p:spPr/>
-        <p:txBody>
-          <a:bodyPr/>
-          <a:lstStyle/>
-          <a:p>
-            <a:r>
-              <a:t>So picture December. A professor grading from a web address. No laptop.</a:t>
-            </a:r>
-          </a:p>
-        </p:txBody>
-      </p:sp>
-      <p:sp>
-        <p:nvSpPr>
-          <p:cNvPr id="4" name="Slide Number Placeholder 3"/>
-          <p:cNvSpPr>
-            <a:spLocks noGrp="1"/>
-          </p:cNvSpPr>
-          <p:nvPr>
-            <p:ph type="sldNum" idx="5" sz="quarter"/>
-          </p:nvPr>
-        </p:nvSpPr>
-        <p:spPr/>
-      </p:sp>
-    </p:spTree>
-  </p:cSld>
-  <p:clrMapOvr>
-    <a:masterClrMapping/>
-  </p:clrMapOvr>
-</p:notes>
-</file>
-
-<file path=ppt/notesSlides/notesSlide34.xml><?xml version="1.0" encoding="utf-8"?>
-<p:notes xmlns:a="http://schemas.openxmlformats.org/drawingml/2006/main" xmlns:p="http://schemas.openxmlformats.org/presentationml/2006/main" xmlns:r="http://schemas.openxmlformats.org/officeDocument/2006/relationships">
-  <p:cSld>
-    <p:spTree>
-      <p:nvGrpSpPr>
-        <p:cNvPr id="1" name=""/>
-        <p:cNvGrpSpPr/>
-        <p:nvPr/>
-      </p:nvGrpSpPr>
-      <p:grpSpPr>
-        <a:xfrm>
-          <a:off x="0" y="0"/>
-          <a:ext cx="0" cy="0"/>
-          <a:chOff x="0" y="0"/>
-          <a:chExt cx="0" cy="0"/>
-        </a:xfrm>
-      </p:grpSpPr>
-      <p:sp>
-        <p:nvSpPr>
-          <p:cNvPr id="2" name="Slide Image Placeholder 1"/>
-          <p:cNvSpPr>
-            <a:spLocks noGrp="1"/>
-          </p:cNvSpPr>
-          <p:nvPr>
-            <p:ph type="sldImg" idx="2"/>
-          </p:nvPr>
-        </p:nvSpPr>
-        <p:spPr/>
-      </p:sp>
-      <p:sp>
-        <p:nvSpPr>
-          <p:cNvPr id="3" name="Notes Placeholder 2"/>
-          <p:cNvSpPr>
-            <a:spLocks noGrp="1"/>
-          </p:cNvSpPr>
-          <p:nvPr>
-            <p:ph type="body" idx="3" sz="quarter"/>
-          </p:nvPr>
-        </p:nvSpPr>
-        <p:spPr/>
-        <p:txBody>
-          <a:bodyPr/>
-          <a:lstStyle/>
-          <a:p>
-            <a:r>
-              <a:t>Deployments that run themselves, so a bad change never reaches a student.</a:t>
-            </a:r>
-          </a:p>
-        </p:txBody>
-      </p:sp>
-      <p:sp>
-        <p:nvSpPr>
-          <p:cNvPr id="4" name="Slide Number Placeholder 3"/>
-          <p:cNvSpPr>
-            <a:spLocks noGrp="1"/>
-          </p:cNvSpPr>
-          <p:nvPr>
-            <p:ph type="sldNum" idx="5" sz="quarter"/>
-          </p:nvPr>
-        </p:nvSpPr>
-        <p:spPr/>
-      </p:sp>
-    </p:spTree>
-  </p:cSld>
-  <p:clrMapOvr>
-    <a:masterClrMapping/>
-  </p:clrMapOvr>
-</p:notes>
-</file>
-
-<file path=ppt/notesSlides/notesSlide35.xml><?xml version="1.0" encoding="utf-8"?>
-<p:notes xmlns:a="http://schemas.openxmlformats.org/drawingml/2006/main" xmlns:p="http://schemas.openxmlformats.org/presentationml/2006/main" xmlns:r="http://schemas.openxmlformats.org/officeDocument/2006/relationships">
-  <p:cSld>
-    <p:spTree>
-      <p:nvGrpSpPr>
-        <p:cNvPr id="1" name=""/>
-        <p:cNvGrpSpPr/>
-        <p:nvPr/>
-      </p:nvGrpSpPr>
-      <p:grpSpPr>
-        <a:xfrm>
-          <a:off x="0" y="0"/>
-          <a:ext cx="0" cy="0"/>
-          <a:chOff x="0" y="0"/>
-          <a:chExt cx="0" cy="0"/>
-        </a:xfrm>
-      </p:grpSpPr>
-      <p:sp>
-        <p:nvSpPr>
-          <p:cNvPr id="2" name="Slide Image Placeholder 1"/>
-          <p:cNvSpPr>
-            <a:spLocks noGrp="1"/>
-          </p:cNvSpPr>
-          <p:nvPr>
-            <p:ph type="sldImg" idx="2"/>
-          </p:nvPr>
-        </p:nvSpPr>
-        <p:spPr/>
-      </p:sp>
-      <p:sp>
-        <p:nvSpPr>
-          <p:cNvPr id="3" name="Notes Placeholder 2"/>
-          <p:cNvSpPr>
-            <a:spLocks noGrp="1"/>
-          </p:cNvSpPr>
-          <p:nvPr>
-            <p:ph type="body" idx="3" sz="quarter"/>
-          </p:nvPr>
-        </p:nvSpPr>
-        <p:spPr/>
-        <p:txBody>
-          <a:bodyPr/>
-          <a:lstStyle/>
-          <a:p>
-            <a:r>
-              <a:t>And real evidence about whether talking to a face makes better advisors. It might not. We publish either way.</a:t>
-            </a:r>
-          </a:p>
-        </p:txBody>
-      </p:sp>
-      <p:sp>
-        <p:nvSpPr>
-          <p:cNvPr id="4" name="Slide Number Placeholder 3"/>
-          <p:cNvSpPr>
-            <a:spLocks noGrp="1"/>
-          </p:cNvSpPr>
-          <p:nvPr>
-            <p:ph type="sldNum" idx="5" sz="quarter"/>
-          </p:nvPr>
-        </p:nvSpPr>
-        <p:spPr/>
-      </p:sp>
-    </p:spTree>
-  </p:cSld>
-  <p:clrMapOvr>
-    <a:masterClrMapping/>
-  </p:clrMapOvr>
-</p:notes>
-</file>
-
-<file path=ppt/notesSlides/notesSlide36.xml><?xml version="1.0" encoding="utf-8"?>
-<p:notes xmlns:a="http://schemas.openxmlformats.org/drawingml/2006/main" xmlns:p="http://schemas.openxmlformats.org/presentationml/2006/main" xmlns:r="http://schemas.openxmlformats.org/officeDocument/2006/relationships">
-  <p:cSld>
-    <p:spTree>
-      <p:nvGrpSpPr>
-        <p:cNvPr id="1" name=""/>
-        <p:cNvGrpSpPr/>
-        <p:nvPr/>
-      </p:nvGrpSpPr>
-      <p:grpSpPr>
-        <a:xfrm>
-          <a:off x="0" y="0"/>
-          <a:ext cx="0" cy="0"/>
-          <a:chOff x="0" y="0"/>
-          <a:chExt cx="0" cy="0"/>
-        </a:xfrm>
-      </p:grpSpPr>
-      <p:sp>
-        <p:nvSpPr>
-          <p:cNvPr id="2" name="Slide Image Placeholder 1"/>
-          <p:cNvSpPr>
-            <a:spLocks noGrp="1"/>
-          </p:cNvSpPr>
-          <p:nvPr>
-            <p:ph type="sldImg" idx="2"/>
-          </p:nvPr>
-        </p:nvSpPr>
-        <p:spPr/>
-      </p:sp>
-      <p:sp>
-        <p:nvSpPr>
-          <p:cNvPr id="3" name="Notes Placeholder 2"/>
-          <p:cNvSpPr>
-            <a:spLocks noGrp="1"/>
-          </p:cNvSpPr>
-          <p:nvPr>
-            <p:ph type="body" idx="3" sz="quarter"/>
-          </p:nvPr>
-        </p:nvSpPr>
-        <p:spPr/>
-        <p:txBody>
-          <a:bodyPr/>
-          <a:lstStyle/>
-          <a:p>
-            <a:r>
-              <a:t>Because we're not here just to finish a system. We're here to leave one where the interesting work is the teaching, not the plumbing.</a:t>
+              <a:t>Here's the problem I'm trying to solve. My students are learning to advise families about money, and the hard part isn't the arithmetic.</a:t>
             </a:r>
           </a:p>
         </p:txBody>
@@ -2637,7 +1998,7 @@
           <a:lstStyle/>
           <a:p>
             <a:r>
-              <a:t>Every question is scored, and the professor sees it all in one place.</a:t>
+              <a:t>It's sitting across from people and asking uncomfortable questions well. So we built them somebody to practise on. An A-I family with a real financial situation, taken from the course material, so it doesn't make things up.</a:t>
             </a:r>
           </a:p>
         </p:txBody>
@@ -2707,7 +2068,7 @@
           <a:lstStyle/>
           <a:p>
             <a:r>
-              <a:t>And that's the real gift. Practice at midnight, a hundred times, no schedule to book.</a:t>
+              <a:t>And because every question gets scored automatically, I can see how forty students are doing without reading forty transcripts.</a:t>
             </a:r>
           </a:p>
         </p:txBody>
@@ -2777,7 +2138,7 @@
           <a:lstStyle/>
           <a:p>
             <a:r>
-              <a:t>It works. Students use it today. But three things hold it back. We're three versions behind the software underneath, and falling further.</a:t>
+              <a:t>Today the whole thing lives in a browser, on a cloud machine, built on an open source platform called Open Web U-I.</a:t>
             </a:r>
           </a:p>
         </p:txBody>
@@ -2847,7 +2208,7 @@
           <a:lstStyle/>
           <a:p>
             <a:r>
-              <a:t>The professor's grading tool only runs on a laptop, and takes a terminal and a developer.</a:t>
+              <a:t>Underneath there are about eight moving parts, and one language model doing the talking.</a:t>
             </a:r>
           </a:p>
         </p:txBody>
@@ -2917,7 +2278,7 @@
           <a:lstStyle/>
           <a:p>
             <a:r>
-              <a:t>And every deployment leans on steps someone has to remember. Sometimes they don't.</a:t>
+              <a:t>It works. Students use it every week, and that's exactly why the next step is worth taking seriously.</a:t>
             </a:r>
           </a:p>
         </p:txBody>
@@ -2987,7 +2348,7 @@
           <a:lstStyle/>
           <a:p>
             <a:r>
-              <a:t>None of it's glamorous. But it's the distance between a system that works and one you can hand over.</a:t>
+              <a:t>There are two things I want to fix. The first isn't glamorous. We've drifted behind the software underneath us, and every update takes somebody who knows where everything is.</a:t>
             </a:r>
           </a:p>
         </p:txBody>
@@ -6457,7 +5818,7 @@
       <p:grpSpPr/>
       <p:pic>
         <p:nvPicPr>
-          <p:cNvPr id="2" name="Picture 1" descr="slide-02.png"/>
+          <p:cNvPr id="2" name="Picture 1" descr="slide-01.png"/>
           <p:cNvPicPr>
             <a:picLocks noChangeAspect="1"/>
           </p:cNvPicPr>
@@ -6823,90 +6184,6 @@
 </p:sld>
 </file>
 
-<file path=ppt/slides/slide28.xml><?xml version="1.0" encoding="utf-8"?>
-<p:sld xmlns:a="http://schemas.openxmlformats.org/drawingml/2006/main" xmlns:p="http://schemas.openxmlformats.org/presentationml/2006/main" xmlns:r="http://schemas.openxmlformats.org/officeDocument/2006/relationships">
-  <p:cSld>
-    <p:spTree>
-      <p:nvGrpSpPr>
-        <p:cNvPr id="1" name=""/>
-        <p:cNvGrpSpPr/>
-        <p:nvPr/>
-      </p:nvGrpSpPr>
-      <p:grpSpPr/>
-      <p:pic>
-        <p:nvPicPr>
-          <p:cNvPr id="2" name="Picture 1" descr="slide-28.png"/>
-          <p:cNvPicPr>
-            <a:picLocks noChangeAspect="1"/>
-          </p:cNvPicPr>
-          <p:nvPr/>
-        </p:nvPicPr>
-        <p:blipFill>
-          <a:blip r:embed="rId2"/>
-          <a:stretch>
-            <a:fillRect/>
-          </a:stretch>
-        </p:blipFill>
-        <p:spPr>
-          <a:xfrm>
-            <a:off x="0" y="0"/>
-            <a:ext cx="12191695" cy="6858000"/>
-          </a:xfrm>
-          <a:prstGeom prst="rect">
-            <a:avLst/>
-          </a:prstGeom>
-        </p:spPr>
-      </p:pic>
-    </p:spTree>
-  </p:cSld>
-  <p:clrMapOvr>
-    <a:masterClrMapping/>
-  </p:clrMapOvr>
-</p:sld>
-</file>
-
-<file path=ppt/slides/slide29.xml><?xml version="1.0" encoding="utf-8"?>
-<p:sld xmlns:a="http://schemas.openxmlformats.org/drawingml/2006/main" xmlns:p="http://schemas.openxmlformats.org/presentationml/2006/main" xmlns:r="http://schemas.openxmlformats.org/officeDocument/2006/relationships">
-  <p:cSld>
-    <p:spTree>
-      <p:nvGrpSpPr>
-        <p:cNvPr id="1" name=""/>
-        <p:cNvGrpSpPr/>
-        <p:nvPr/>
-      </p:nvGrpSpPr>
-      <p:grpSpPr/>
-      <p:pic>
-        <p:nvPicPr>
-          <p:cNvPr id="2" name="Picture 1" descr="slide-29.png"/>
-          <p:cNvPicPr>
-            <a:picLocks noChangeAspect="1"/>
-          </p:cNvPicPr>
-          <p:nvPr/>
-        </p:nvPicPr>
-        <p:blipFill>
-          <a:blip r:embed="rId2"/>
-          <a:stretch>
-            <a:fillRect/>
-          </a:stretch>
-        </p:blipFill>
-        <p:spPr>
-          <a:xfrm>
-            <a:off x="0" y="0"/>
-            <a:ext cx="12191695" cy="6858000"/>
-          </a:xfrm>
-          <a:prstGeom prst="rect">
-            <a:avLst/>
-          </a:prstGeom>
-        </p:spPr>
-      </p:pic>
-    </p:spTree>
-  </p:cSld>
-  <p:clrMapOvr>
-    <a:masterClrMapping/>
-  </p:clrMapOvr>
-</p:sld>
-</file>
-
 <file path=ppt/slides/slide3.xml><?xml version="1.0" encoding="utf-8"?>
 <p:sld xmlns:a="http://schemas.openxmlformats.org/drawingml/2006/main" xmlns:p="http://schemas.openxmlformats.org/presentationml/2006/main" xmlns:r="http://schemas.openxmlformats.org/officeDocument/2006/relationships">
   <p:cSld>
@@ -6920,300 +6197,6 @@
       <p:pic>
         <p:nvPicPr>
           <p:cNvPr id="2" name="Picture 1" descr="slide-03.png"/>
-          <p:cNvPicPr>
-            <a:picLocks noChangeAspect="1"/>
-          </p:cNvPicPr>
-          <p:nvPr/>
-        </p:nvPicPr>
-        <p:blipFill>
-          <a:blip r:embed="rId2"/>
-          <a:stretch>
-            <a:fillRect/>
-          </a:stretch>
-        </p:blipFill>
-        <p:spPr>
-          <a:xfrm>
-            <a:off x="0" y="0"/>
-            <a:ext cx="12191695" cy="6858000"/>
-          </a:xfrm>
-          <a:prstGeom prst="rect">
-            <a:avLst/>
-          </a:prstGeom>
-        </p:spPr>
-      </p:pic>
-    </p:spTree>
-  </p:cSld>
-  <p:clrMapOvr>
-    <a:masterClrMapping/>
-  </p:clrMapOvr>
-</p:sld>
-</file>
-
-<file path=ppt/slides/slide30.xml><?xml version="1.0" encoding="utf-8"?>
-<p:sld xmlns:a="http://schemas.openxmlformats.org/drawingml/2006/main" xmlns:p="http://schemas.openxmlformats.org/presentationml/2006/main" xmlns:r="http://schemas.openxmlformats.org/officeDocument/2006/relationships">
-  <p:cSld>
-    <p:spTree>
-      <p:nvGrpSpPr>
-        <p:cNvPr id="1" name=""/>
-        <p:cNvGrpSpPr/>
-        <p:nvPr/>
-      </p:nvGrpSpPr>
-      <p:grpSpPr/>
-      <p:pic>
-        <p:nvPicPr>
-          <p:cNvPr id="2" name="Picture 1" descr="slide-30.png"/>
-          <p:cNvPicPr>
-            <a:picLocks noChangeAspect="1"/>
-          </p:cNvPicPr>
-          <p:nvPr/>
-        </p:nvPicPr>
-        <p:blipFill>
-          <a:blip r:embed="rId2"/>
-          <a:stretch>
-            <a:fillRect/>
-          </a:stretch>
-        </p:blipFill>
-        <p:spPr>
-          <a:xfrm>
-            <a:off x="0" y="0"/>
-            <a:ext cx="12191695" cy="6858000"/>
-          </a:xfrm>
-          <a:prstGeom prst="rect">
-            <a:avLst/>
-          </a:prstGeom>
-        </p:spPr>
-      </p:pic>
-    </p:spTree>
-  </p:cSld>
-  <p:clrMapOvr>
-    <a:masterClrMapping/>
-  </p:clrMapOvr>
-</p:sld>
-</file>
-
-<file path=ppt/slides/slide31.xml><?xml version="1.0" encoding="utf-8"?>
-<p:sld xmlns:a="http://schemas.openxmlformats.org/drawingml/2006/main" xmlns:p="http://schemas.openxmlformats.org/presentationml/2006/main" xmlns:r="http://schemas.openxmlformats.org/officeDocument/2006/relationships">
-  <p:cSld>
-    <p:spTree>
-      <p:nvGrpSpPr>
-        <p:cNvPr id="1" name=""/>
-        <p:cNvGrpSpPr/>
-        <p:nvPr/>
-      </p:nvGrpSpPr>
-      <p:grpSpPr/>
-      <p:pic>
-        <p:nvPicPr>
-          <p:cNvPr id="2" name="Picture 1" descr="slide-31.png"/>
-          <p:cNvPicPr>
-            <a:picLocks noChangeAspect="1"/>
-          </p:cNvPicPr>
-          <p:nvPr/>
-        </p:nvPicPr>
-        <p:blipFill>
-          <a:blip r:embed="rId2"/>
-          <a:stretch>
-            <a:fillRect/>
-          </a:stretch>
-        </p:blipFill>
-        <p:spPr>
-          <a:xfrm>
-            <a:off x="0" y="0"/>
-            <a:ext cx="12191695" cy="6858000"/>
-          </a:xfrm>
-          <a:prstGeom prst="rect">
-            <a:avLst/>
-          </a:prstGeom>
-        </p:spPr>
-      </p:pic>
-    </p:spTree>
-  </p:cSld>
-  <p:clrMapOvr>
-    <a:masterClrMapping/>
-  </p:clrMapOvr>
-</p:sld>
-</file>
-
-<file path=ppt/slides/slide32.xml><?xml version="1.0" encoding="utf-8"?>
-<p:sld xmlns:a="http://schemas.openxmlformats.org/drawingml/2006/main" xmlns:p="http://schemas.openxmlformats.org/presentationml/2006/main" xmlns:r="http://schemas.openxmlformats.org/officeDocument/2006/relationships">
-  <p:cSld>
-    <p:spTree>
-      <p:nvGrpSpPr>
-        <p:cNvPr id="1" name=""/>
-        <p:cNvGrpSpPr/>
-        <p:nvPr/>
-      </p:nvGrpSpPr>
-      <p:grpSpPr/>
-      <p:pic>
-        <p:nvPicPr>
-          <p:cNvPr id="2" name="Picture 1" descr="slide-32.png"/>
-          <p:cNvPicPr>
-            <a:picLocks noChangeAspect="1"/>
-          </p:cNvPicPr>
-          <p:nvPr/>
-        </p:nvPicPr>
-        <p:blipFill>
-          <a:blip r:embed="rId2"/>
-          <a:stretch>
-            <a:fillRect/>
-          </a:stretch>
-        </p:blipFill>
-        <p:spPr>
-          <a:xfrm>
-            <a:off x="0" y="0"/>
-            <a:ext cx="12191695" cy="6858000"/>
-          </a:xfrm>
-          <a:prstGeom prst="rect">
-            <a:avLst/>
-          </a:prstGeom>
-        </p:spPr>
-      </p:pic>
-    </p:spTree>
-  </p:cSld>
-  <p:clrMapOvr>
-    <a:masterClrMapping/>
-  </p:clrMapOvr>
-</p:sld>
-</file>
-
-<file path=ppt/slides/slide33.xml><?xml version="1.0" encoding="utf-8"?>
-<p:sld xmlns:a="http://schemas.openxmlformats.org/drawingml/2006/main" xmlns:p="http://schemas.openxmlformats.org/presentationml/2006/main" xmlns:r="http://schemas.openxmlformats.org/officeDocument/2006/relationships">
-  <p:cSld>
-    <p:spTree>
-      <p:nvGrpSpPr>
-        <p:cNvPr id="1" name=""/>
-        <p:cNvGrpSpPr/>
-        <p:nvPr/>
-      </p:nvGrpSpPr>
-      <p:grpSpPr/>
-      <p:pic>
-        <p:nvPicPr>
-          <p:cNvPr id="2" name="Picture 1" descr="slide-33.png"/>
-          <p:cNvPicPr>
-            <a:picLocks noChangeAspect="1"/>
-          </p:cNvPicPr>
-          <p:nvPr/>
-        </p:nvPicPr>
-        <p:blipFill>
-          <a:blip r:embed="rId2"/>
-          <a:stretch>
-            <a:fillRect/>
-          </a:stretch>
-        </p:blipFill>
-        <p:spPr>
-          <a:xfrm>
-            <a:off x="0" y="0"/>
-            <a:ext cx="12191695" cy="6858000"/>
-          </a:xfrm>
-          <a:prstGeom prst="rect">
-            <a:avLst/>
-          </a:prstGeom>
-        </p:spPr>
-      </p:pic>
-    </p:spTree>
-  </p:cSld>
-  <p:clrMapOvr>
-    <a:masterClrMapping/>
-  </p:clrMapOvr>
-</p:sld>
-</file>
-
-<file path=ppt/slides/slide34.xml><?xml version="1.0" encoding="utf-8"?>
-<p:sld xmlns:a="http://schemas.openxmlformats.org/drawingml/2006/main" xmlns:p="http://schemas.openxmlformats.org/presentationml/2006/main" xmlns:r="http://schemas.openxmlformats.org/officeDocument/2006/relationships">
-  <p:cSld>
-    <p:spTree>
-      <p:nvGrpSpPr>
-        <p:cNvPr id="1" name=""/>
-        <p:cNvGrpSpPr/>
-        <p:nvPr/>
-      </p:nvGrpSpPr>
-      <p:grpSpPr/>
-      <p:pic>
-        <p:nvPicPr>
-          <p:cNvPr id="2" name="Picture 1" descr="slide-34.png"/>
-          <p:cNvPicPr>
-            <a:picLocks noChangeAspect="1"/>
-          </p:cNvPicPr>
-          <p:nvPr/>
-        </p:nvPicPr>
-        <p:blipFill>
-          <a:blip r:embed="rId2"/>
-          <a:stretch>
-            <a:fillRect/>
-          </a:stretch>
-        </p:blipFill>
-        <p:spPr>
-          <a:xfrm>
-            <a:off x="0" y="0"/>
-            <a:ext cx="12191695" cy="6858000"/>
-          </a:xfrm>
-          <a:prstGeom prst="rect">
-            <a:avLst/>
-          </a:prstGeom>
-        </p:spPr>
-      </p:pic>
-    </p:spTree>
-  </p:cSld>
-  <p:clrMapOvr>
-    <a:masterClrMapping/>
-  </p:clrMapOvr>
-</p:sld>
-</file>
-
-<file path=ppt/slides/slide35.xml><?xml version="1.0" encoding="utf-8"?>
-<p:sld xmlns:a="http://schemas.openxmlformats.org/drawingml/2006/main" xmlns:p="http://schemas.openxmlformats.org/presentationml/2006/main" xmlns:r="http://schemas.openxmlformats.org/officeDocument/2006/relationships">
-  <p:cSld>
-    <p:spTree>
-      <p:nvGrpSpPr>
-        <p:cNvPr id="1" name=""/>
-        <p:cNvGrpSpPr/>
-        <p:nvPr/>
-      </p:nvGrpSpPr>
-      <p:grpSpPr/>
-      <p:pic>
-        <p:nvPicPr>
-          <p:cNvPr id="2" name="Picture 1" descr="slide-35.png"/>
-          <p:cNvPicPr>
-            <a:picLocks noChangeAspect="1"/>
-          </p:cNvPicPr>
-          <p:nvPr/>
-        </p:nvPicPr>
-        <p:blipFill>
-          <a:blip r:embed="rId2"/>
-          <a:stretch>
-            <a:fillRect/>
-          </a:stretch>
-        </p:blipFill>
-        <p:spPr>
-          <a:xfrm>
-            <a:off x="0" y="0"/>
-            <a:ext cx="12191695" cy="6858000"/>
-          </a:xfrm>
-          <a:prstGeom prst="rect">
-            <a:avLst/>
-          </a:prstGeom>
-        </p:spPr>
-      </p:pic>
-    </p:spTree>
-  </p:cSld>
-  <p:clrMapOvr>
-    <a:masterClrMapping/>
-  </p:clrMapOvr>
-</p:sld>
-</file>
-
-<file path=ppt/slides/slide36.xml><?xml version="1.0" encoding="utf-8"?>
-<p:sld xmlns:a="http://schemas.openxmlformats.org/drawingml/2006/main" xmlns:p="http://schemas.openxmlformats.org/presentationml/2006/main" xmlns:r="http://schemas.openxmlformats.org/officeDocument/2006/relationships">
-  <p:cSld>
-    <p:spTree>
-      <p:nvGrpSpPr>
-        <p:cNvPr id="1" name=""/>
-        <p:cNvGrpSpPr/>
-        <p:nvPr/>
-      </p:nvGrpSpPr>
-      <p:grpSpPr/>
-      <p:pic>
-        <p:nvPicPr>
-          <p:cNvPr id="2" name="Picture 1" descr="slide-36.png"/>
           <p:cNvPicPr>
             <a:picLocks noChangeAspect="1"/>
           </p:cNvPicPr>

--- a/capstone_fall2026/slides/familyfinancechat-fall2026-heygen.pptx
+++ b/capstone_fall2026/slides/familyfinancechat-fall2026-heygen.pptx
@@ -32,6 +32,7 @@
     <p:sldId id="280" r:id="rId32"/>
     <p:sldId id="281" r:id="rId33"/>
     <p:sldId id="282" r:id="rId34"/>
+    <p:sldId id="283" r:id="rId35"/>
   </p:sldIdLst>
   <p:sldSz cx="12191695" cy="6858000" type="screen4x3"/>
   <p:notesSz cx="6858000" cy="9144000"/>
@@ -528,7 +529,7 @@
           <a:lstStyle/>
           <a:p>
             <a:r>
-              <a:t>Hi. I'm Mark Fedenia. I teach finance at Wisconsin, and I want to show you something my students use, and where I'd like to take it next.</a:t>
+              <a:t>Hi there.</a:t>
             </a:r>
           </a:p>
         </p:txBody>
@@ -598,7 +599,7 @@
           <a:lstStyle/>
           <a:p>
             <a:r>
-              <a:t>The second is the one I'm excited about. I want the student to stop typing.</a:t>
+              <a:t>There are two things I want to fix. The first isn't glamorous. We've drifted behind the software underneath us, and every update takes somebody who knows where everything is.</a:t>
             </a:r>
           </a:p>
         </p:txBody>
@@ -668,7 +669,7 @@
           <a:lstStyle/>
           <a:p>
             <a:r>
-              <a:t>So, the groundwork. Get current with the platform, and stay current, so upgrades stop being frightening.</a:t>
+              <a:t>The second is the one I'm excited about. I want the student to stop typing.</a:t>
             </a:r>
           </a:p>
         </p:txBody>
@@ -738,7 +739,7 @@
           <a:lstStyle/>
           <a:p>
             <a:r>
-              <a:t>Put the grading on the web where any instructor can open it, instead of on one laptop in my office.</a:t>
+              <a:t>So, the groundwork. Get current with the platform, and stay current, so upgrades stop being frightening.</a:t>
             </a:r>
           </a:p>
         </p:txBody>
@@ -808,7 +809,7 @@
           <a:lstStyle/>
           <a:p>
             <a:r>
-              <a:t>And make deployment automatic, so improving this thing doesn't depend on one person remembering the steps.</a:t>
+              <a:t>Put the grading on the web where any instructor can open it, instead of on one laptop in my office.</a:t>
             </a:r>
           </a:p>
         </p:txBody>
@@ -878,7 +879,7 @@
           <a:lstStyle/>
           <a:p>
             <a:r>
-              <a:t>Now the interesting part. Right now a student types a question and reads an answer, which is nothing like the job.</a:t>
+              <a:t>And make deployment automatic, so improving this thing doesn't depend on one person remembering the steps.</a:t>
             </a:r>
           </a:p>
         </p:txBody>
@@ -948,7 +949,7 @@
           <a:lstStyle/>
           <a:p>
             <a:r>
-              <a:t>I want them to say it out loud, to a face that listens, waits, and answers back in character.</a:t>
+              <a:t>Now the interesting part. Right now a student types a question and reads an answer, which is nothing like the job.</a:t>
             </a:r>
           </a:p>
         </p:txBody>
@@ -1018,7 +1019,7 @@
           <a:lstStyle/>
           <a:p>
             <a:r>
-              <a:t>Because in a real meeting you get one shot. You ask the hard question out loud, once, while a family watches your face.</a:t>
+              <a:t>I want them to say it out loud, to a face that listens, waits, and answers back in character.</a:t>
             </a:r>
           </a:p>
         </p:txBody>
@@ -1088,7 +1089,7 @@
           <a:lstStyle/>
           <a:p>
             <a:r>
-              <a:t>You can't practise that with a keyboard. There's no backspace key in that room.</a:t>
+              <a:t>Because in a real meeting you get one shot. You ask the hard question out loud, once, while a family watches your face.</a:t>
             </a:r>
           </a:p>
         </p:txBody>
@@ -1158,7 +1159,7 @@
           <a:lstStyle/>
           <a:p>
             <a:r>
-              <a:t>So here's the actual project. There are a dozen companies now doing real time avatars, and none of them have been tested for something like this. Somebody has to find out which one holds up.</a:t>
+              <a:t>You can't practise that with a keyboard. There's no backspace key in that room.</a:t>
             </a:r>
           </a:p>
         </p:txBody>
@@ -1228,7 +1229,7 @@
           <a:lstStyle/>
           <a:p>
             <a:r>
-              <a:t>Speed matters most. If it takes longer than about a second to answer, it stops feeling like a conversation and starts feeling like a machine.</a:t>
+              <a:t>So here's the actual project. There are a dozen companies now doing real time avatars, and none of them have been tested for something like this. Somebody has to find out which one holds up.</a:t>
             </a:r>
           </a:p>
         </p:txBody>
@@ -1298,7 +1299,7 @@
           <a:lstStyle/>
           <a:p>
             <a:r>
-              <a:t>It's called Family Finance Chat, and right now it's a chat box. By the end of this project, I want it to be a face you talk to.</a:t>
+              <a:t>I'm Mark Fedeenia. I teach finance at Wisconsin, and I want to show you something my students use, and where I'd like to take it next.</a:t>
             </a:r>
           </a:p>
         </p:txBody>
@@ -1368,7 +1369,7 @@
           <a:lstStyle/>
           <a:p>
             <a:r>
-              <a:t>Then cost, per student, per semester, with a ceiling we can actually live with.</a:t>
+              <a:t>Speed matters most. If it takes longer than about a second to answer, it stops feeling like a conversation and starts feeling like a machine.</a:t>
             </a:r>
           </a:p>
         </p:txBody>
@@ -1438,7 +1439,7 @@
           <a:lstStyle/>
           <a:p>
             <a:r>
-              <a:t>And permission, because a student's voice and face are protected records, and that gets settled before anyone records anything.</a:t>
+              <a:t>Then cost, per student, per semester, with a ceiling we can actually live with.</a:t>
             </a:r>
           </a:p>
         </p:txBody>
@@ -1508,7 +1509,7 @@
           <a:lstStyle/>
           <a:p>
             <a:r>
-              <a:t>Whatever wins has to bolt on beside what we already have, not replace it.</a:t>
+              <a:t>And permission, because a student's voice and face are protected records, and that gets settled before anyone records anything.</a:t>
             </a:r>
           </a:p>
         </p:txBody>
@@ -1578,7 +1579,7 @@
           <a:lstStyle/>
           <a:p>
             <a:r>
-              <a:t>A separate service that handles the talking.</a:t>
+              <a:t>Whatever wins has to bolt on beside what we already have, not replace it.</a:t>
             </a:r>
           </a:p>
         </p:txBody>
@@ -1648,7 +1649,7 @@
           <a:lstStyle/>
           <a:p>
             <a:r>
-              <a:t>It asks the existing system for the answer, so the grading and the course material keep working exactly as they do now. And if it turns out not to be worth it, we switch it off and lose nothing.</a:t>
+              <a:t>A separate service that handles the talking.</a:t>
             </a:r>
           </a:p>
         </p:txBody>
@@ -1718,7 +1719,7 @@
           <a:lstStyle/>
           <a:p>
             <a:r>
-              <a:t>What I want by the end of the term is students actually talking to this thing.</a:t>
+              <a:t>It asks the existing system for the answer, so the grading and the course material keep working exactly as they do now. And if it turns out not to be worth it, we switch it off and lose nothing.</a:t>
             </a:r>
           </a:p>
         </p:txBody>
@@ -1788,7 +1789,7 @@
           <a:lstStyle/>
           <a:p>
             <a:r>
-              <a:t>And I want to know whether it makes them better at the job. Measured, not guessed.</a:t>
+              <a:t>What I want by the end of the term is students actually talking to this thing.</a:t>
             </a:r>
           </a:p>
         </p:txBody>
@@ -1858,6 +1859,76 @@
           <a:lstStyle/>
           <a:p>
             <a:r>
+              <a:t>And I want to know whether it makes them better at the job. Measured, not guessed.</a:t>
+            </a:r>
+          </a:p>
+        </p:txBody>
+      </p:sp>
+      <p:sp>
+        <p:nvSpPr>
+          <p:cNvPr id="4" name="Slide Number Placeholder 3"/>
+          <p:cNvSpPr>
+            <a:spLocks noGrp="1"/>
+          </p:cNvSpPr>
+          <p:nvPr>
+            <p:ph type="sldNum" idx="5" sz="quarter"/>
+          </p:nvPr>
+        </p:nvSpPr>
+        <p:spPr/>
+      </p:sp>
+    </p:spTree>
+  </p:cSld>
+  <p:clrMapOvr>
+    <a:masterClrMapping/>
+  </p:clrMapOvr>
+</p:notes>
+</file>
+
+<file path=ppt/notesSlides/notesSlide28.xml><?xml version="1.0" encoding="utf-8"?>
+<p:notes xmlns:a="http://schemas.openxmlformats.org/drawingml/2006/main" xmlns:p="http://schemas.openxmlformats.org/presentationml/2006/main" xmlns:r="http://schemas.openxmlformats.org/officeDocument/2006/relationships">
+  <p:cSld>
+    <p:spTree>
+      <p:nvGrpSpPr>
+        <p:cNvPr id="1" name=""/>
+        <p:cNvGrpSpPr/>
+        <p:nvPr/>
+      </p:nvGrpSpPr>
+      <p:grpSpPr>
+        <a:xfrm>
+          <a:off x="0" y="0"/>
+          <a:ext cx="0" cy="0"/>
+          <a:chOff x="0" y="0"/>
+          <a:chExt cx="0" cy="0"/>
+        </a:xfrm>
+      </p:grpSpPr>
+      <p:sp>
+        <p:nvSpPr>
+          <p:cNvPr id="2" name="Slide Image Placeholder 1"/>
+          <p:cNvSpPr>
+            <a:spLocks noGrp="1"/>
+          </p:cNvSpPr>
+          <p:nvPr>
+            <p:ph type="sldImg" idx="2"/>
+          </p:nvPr>
+        </p:nvSpPr>
+        <p:spPr/>
+      </p:sp>
+      <p:sp>
+        <p:nvSpPr>
+          <p:cNvPr id="3" name="Notes Placeholder 2"/>
+          <p:cNvSpPr>
+            <a:spLocks noGrp="1"/>
+          </p:cNvSpPr>
+          <p:nvPr>
+            <p:ph type="body" idx="3" sz="quarter"/>
+          </p:nvPr>
+        </p:nvSpPr>
+        <p:spPr/>
+        <p:txBody>
+          <a:bodyPr/>
+          <a:lstStyle/>
+          <a:p>
+            <a:r>
               <a:t>It might turn out that it doesn't, and that's a finding worth publishing too. If that sounds like a semester well spent, come build it with us.</a:t>
             </a:r>
           </a:p>
@@ -1928,7 +1999,7 @@
           <a:lstStyle/>
           <a:p>
             <a:r>
-              <a:t>Here's the problem I'm trying to solve. My students are learning to advise families about money, and the hard part isn't the arithmetic.</a:t>
+              <a:t>It's called Family Finance Chat, and right now it's a chat box. By the end of this project, I want it to be a face you talk to.</a:t>
             </a:r>
           </a:p>
         </p:txBody>
@@ -1998,7 +2069,7 @@
           <a:lstStyle/>
           <a:p>
             <a:r>
-              <a:t>It's sitting across from people and asking uncomfortable questions well. So we built them somebody to practise on. An A-I family with a real financial situation, taken from the course material, so it doesn't make things up.</a:t>
+              <a:t>Here's the problem I'm trying to solve. My students are learning to advise families about money, and the hard part isn't the arithmetic.</a:t>
             </a:r>
           </a:p>
         </p:txBody>
@@ -2068,7 +2139,7 @@
           <a:lstStyle/>
           <a:p>
             <a:r>
-              <a:t>And because every question gets scored automatically, I can see how forty students are doing without reading forty transcripts.</a:t>
+              <a:t>It's sitting across from people and asking uncomfortable questions well. So we built them somebody to practise on. An A-I family with a real financial situation, taken from the course material, so it doesn't make things up.</a:t>
             </a:r>
           </a:p>
         </p:txBody>
@@ -2138,7 +2209,7 @@
           <a:lstStyle/>
           <a:p>
             <a:r>
-              <a:t>Today the whole thing lives in a browser, on a cloud machine, built on an open source platform called Open Web U-I.</a:t>
+              <a:t>And because every question gets scored automatically, I can see how forty students are doing without reading forty transcripts.</a:t>
             </a:r>
           </a:p>
         </p:txBody>
@@ -2208,7 +2279,7 @@
           <a:lstStyle/>
           <a:p>
             <a:r>
-              <a:t>Underneath there are about eight moving parts, and one language model doing the talking.</a:t>
+              <a:t>Today the whole thing lives in a browser, on a cloud machine, built on an open source platform called Open Web U-I.</a:t>
             </a:r>
           </a:p>
         </p:txBody>
@@ -2278,7 +2349,7 @@
           <a:lstStyle/>
           <a:p>
             <a:r>
-              <a:t>It works. Students use it every week, and that's exactly why the next step is worth taking seriously.</a:t>
+              <a:t>Underneath there are about eight moving parts, and one language model doing the talking.</a:t>
             </a:r>
           </a:p>
         </p:txBody>
@@ -2348,7 +2419,7 @@
           <a:lstStyle/>
           <a:p>
             <a:r>
-              <a:t>There are two things I want to fix. The first isn't glamorous. We've drifted behind the software underneath us, and every update takes somebody who knows where everything is.</a:t>
+              <a:t>It works. Students use it every week, and that's exactly why the next step is worth taking seriously.</a:t>
             </a:r>
           </a:p>
         </p:txBody>
@@ -6184,6 +6255,48 @@
 </p:sld>
 </file>
 
+<file path=ppt/slides/slide28.xml><?xml version="1.0" encoding="utf-8"?>
+<p:sld xmlns:a="http://schemas.openxmlformats.org/drawingml/2006/main" xmlns:p="http://schemas.openxmlformats.org/presentationml/2006/main" xmlns:r="http://schemas.openxmlformats.org/officeDocument/2006/relationships">
+  <p:cSld>
+    <p:spTree>
+      <p:nvGrpSpPr>
+        <p:cNvPr id="1" name=""/>
+        <p:cNvGrpSpPr/>
+        <p:nvPr/>
+      </p:nvGrpSpPr>
+      <p:grpSpPr/>
+      <p:pic>
+        <p:nvPicPr>
+          <p:cNvPr id="2" name="Picture 1" descr="slide-28.png"/>
+          <p:cNvPicPr>
+            <a:picLocks noChangeAspect="1"/>
+          </p:cNvPicPr>
+          <p:nvPr/>
+        </p:nvPicPr>
+        <p:blipFill>
+          <a:blip r:embed="rId2"/>
+          <a:stretch>
+            <a:fillRect/>
+          </a:stretch>
+        </p:blipFill>
+        <p:spPr>
+          <a:xfrm>
+            <a:off x="0" y="0"/>
+            <a:ext cx="12191695" cy="6858000"/>
+          </a:xfrm>
+          <a:prstGeom prst="rect">
+            <a:avLst/>
+          </a:prstGeom>
+        </p:spPr>
+      </p:pic>
+    </p:spTree>
+  </p:cSld>
+  <p:clrMapOvr>
+    <a:masterClrMapping/>
+  </p:clrMapOvr>
+</p:sld>
+</file>
+
 <file path=ppt/slides/slide3.xml><?xml version="1.0" encoding="utf-8"?>
 <p:sld xmlns:a="http://schemas.openxmlformats.org/drawingml/2006/main" xmlns:p="http://schemas.openxmlformats.org/presentationml/2006/main" xmlns:r="http://schemas.openxmlformats.org/officeDocument/2006/relationships">
   <p:cSld>
